--- a/slides.pptx
+++ b/slides.pptx
@@ -712,7 +712,7 @@
           </a:lstStyle>
           <a:p>
             <a:fld id="{FFEE8BD1-4CD9-4E23-9BB3-F9FF5D2B01EB}" type="datetimeFigureOut">
-              <a:t>7/5/26</a:t>
+              <a:t>7/9/26</a:t>
             </a:fld>
             <a:endParaRPr lang="en-US"/>
           </a:p>
@@ -1132,7 +1132,7 @@
           <a:p>
             <a:fld id="{0C56C575-D94E-F044-B574-12900C1740FB}" type="datetimeFigureOut">
               <a:rPr lang="en-US" smtClean="0"/>
-              <a:t>7/5/26</a:t>
+              <a:t>7/9/26</a:t>
             </a:fld>
             <a:endParaRPr lang="en-US"/>
           </a:p>
@@ -1436,7 +1436,7 @@
           <a:p>
             <a:fld id="{0C56C575-D94E-F044-B574-12900C1740FB}" type="datetimeFigureOut">
               <a:rPr lang="en-US" smtClean="0"/>
-              <a:t>7/5/26</a:t>
+              <a:t>7/9/26</a:t>
             </a:fld>
             <a:endParaRPr lang="en-US"/>
           </a:p>
@@ -1634,7 +1634,7 @@
           <a:p>
             <a:fld id="{0C56C575-D94E-F044-B574-12900C1740FB}" type="datetimeFigureOut">
               <a:rPr lang="en-US" smtClean="0"/>
-              <a:t>7/5/26</a:t>
+              <a:t>7/9/26</a:t>
             </a:fld>
             <a:endParaRPr lang="en-US"/>
           </a:p>
@@ -1842,7 +1842,7 @@
           <a:p>
             <a:fld id="{0C56C575-D94E-F044-B574-12900C1740FB}" type="datetimeFigureOut">
               <a:rPr lang="en-US" smtClean="0"/>
-              <a:t>7/5/26</a:t>
+              <a:t>7/9/26</a:t>
             </a:fld>
             <a:endParaRPr lang="en-US"/>
           </a:p>
@@ -2191,7 +2191,7 @@
           <a:p>
             <a:fld id="{0C56C575-D94E-F044-B574-12900C1740FB}" type="datetimeFigureOut">
               <a:rPr lang="en-US" smtClean="0"/>
-              <a:t>7/5/26</a:t>
+              <a:t>7/9/26</a:t>
             </a:fld>
             <a:endParaRPr lang="en-US"/>
           </a:p>
@@ -2475,7 +2475,7 @@
           <a:p>
             <a:fld id="{0C56C575-D94E-F044-B574-12900C1740FB}" type="datetimeFigureOut">
               <a:rPr lang="en-US" smtClean="0"/>
-              <a:t>7/5/26</a:t>
+              <a:t>7/9/26</a:t>
             </a:fld>
             <a:endParaRPr lang="en-US"/>
           </a:p>
@@ -2854,7 +2854,7 @@
           <a:p>
             <a:fld id="{0C56C575-D94E-F044-B574-12900C1740FB}" type="datetimeFigureOut">
               <a:rPr lang="en-US" smtClean="0"/>
-              <a:t>7/5/26</a:t>
+              <a:t>7/9/26</a:t>
             </a:fld>
             <a:endParaRPr lang="en-US"/>
           </a:p>
@@ -3119,7 +3119,7 @@
           <a:p>
             <a:fld id="{0C56C575-D94E-F044-B574-12900C1740FB}" type="datetimeFigureOut">
               <a:rPr lang="en-US" smtClean="0"/>
-              <a:t>7/5/26</a:t>
+              <a:t>7/9/26</a:t>
             </a:fld>
             <a:endParaRPr lang="en-US"/>
           </a:p>
@@ -3531,7 +3531,7 @@
           <a:p>
             <a:fld id="{0C56C575-D94E-F044-B574-12900C1740FB}" type="datetimeFigureOut">
               <a:rPr lang="en-US" smtClean="0"/>
-              <a:t>7/5/26</a:t>
+              <a:t>7/9/26</a:t>
             </a:fld>
             <a:endParaRPr lang="en-US"/>
           </a:p>
@@ -3672,7 +3672,7 @@
           <a:p>
             <a:fld id="{0C56C575-D94E-F044-B574-12900C1740FB}" type="datetimeFigureOut">
               <a:rPr lang="en-US" smtClean="0"/>
-              <a:t>7/5/26</a:t>
+              <a:t>7/9/26</a:t>
             </a:fld>
             <a:endParaRPr lang="en-US"/>
           </a:p>
@@ -3785,7 +3785,7 @@
           <a:p>
             <a:fld id="{0C56C575-D94E-F044-B574-12900C1740FB}" type="datetimeFigureOut">
               <a:rPr lang="en-US" smtClean="0"/>
-              <a:t>7/5/26</a:t>
+              <a:t>7/9/26</a:t>
             </a:fld>
             <a:endParaRPr lang="en-US"/>
           </a:p>
@@ -4112,7 +4112,7 @@
           <a:p>
             <a:fld id="{0C56C575-D94E-F044-B574-12900C1740FB}" type="datetimeFigureOut">
               <a:rPr lang="en-US" smtClean="0"/>
-              <a:t>7/5/26</a:t>
+              <a:t>7/9/26</a:t>
             </a:fld>
             <a:endParaRPr lang="en-US"/>
           </a:p>
@@ -4353,7 +4353,7 @@
           <a:p>
             <a:fld id="{0C56C575-D94E-F044-B574-12900C1740FB}" type="datetimeFigureOut">
               <a:rPr lang="en-US" smtClean="0"/>
-              <a:t>7/5/26</a:t>
+              <a:t>7/9/26</a:t>
             </a:fld>
             <a:endParaRPr lang="en-US"/>
           </a:p>
@@ -5112,15 +5112,8 @@
           <a:p>
             <a:r>
               <a:rPr lang="en-US" dirty="0"/>
-              <a:t>Data Scientist, RCDS</a:t>
-            </a:r>
-          </a:p>
-          <a:p>
-            <a:r>
-              <a:rPr lang="en-US" dirty="0" err="1"/>
-              <a:t>r-giri@northwestern.edu</a:t>
-            </a:r>
-            <a:endParaRPr lang="en-US" dirty="0"/>
+              <a:t>Artur Baranov</a:t>
+            </a:r>
           </a:p>
         </p:txBody>
       </p:sp>
@@ -6531,15 +6524,12 @@
 </file>
 
 <file path=customXml/item1.xml><?xml version="1.0" encoding="utf-8"?>
-<p:properties xmlns:p="http://schemas.microsoft.com/office/2006/metadata/properties" xmlns:xsi="http://www.w3.org/2001/XMLSchema-instance" xmlns:pc="http://schemas.microsoft.com/office/infopath/2007/PartnerControls">
-  <documentManagement>
-    <Notes xmlns="2abaa01e-9938-407e-aa0b-10580c653abd" xsi:nil="true"/>
-    <TaxCatchAll xmlns="efce84db-8738-4c7b-9bdc-65b9500871f6" xsi:nil="true"/>
-    <lcf76f155ced4ddcb4097134ff3c332f xmlns="2abaa01e-9938-407e-aa0b-10580c653abd">
-      <Terms xmlns="http://schemas.microsoft.com/office/infopath/2007/PartnerControls"/>
-    </lcf76f155ced4ddcb4097134ff3c332f>
-  </documentManagement>
-</p:properties>
+<?mso-contentType ?>
+<FormTemplates xmlns="http://schemas.microsoft.com/sharepoint/v3/contenttype/forms">
+  <Display>DocumentLibraryForm</Display>
+  <Edit>DocumentLibraryForm</Edit>
+  <New>DocumentLibraryForm</New>
+</FormTemplates>
 </file>
 
 <file path=customXml/item2.xml><?xml version="1.0" encoding="utf-8"?>
@@ -6805,21 +6795,21 @@
 </file>
 
 <file path=customXml/item3.xml><?xml version="1.0" encoding="utf-8"?>
-<?mso-contentType ?>
-<FormTemplates xmlns="http://schemas.microsoft.com/sharepoint/v3/contenttype/forms">
-  <Display>DocumentLibraryForm</Display>
-  <Edit>DocumentLibraryForm</Edit>
-  <New>DocumentLibraryForm</New>
-</FormTemplates>
+<p:properties xmlns:p="http://schemas.microsoft.com/office/2006/metadata/properties" xmlns:xsi="http://www.w3.org/2001/XMLSchema-instance" xmlns:pc="http://schemas.microsoft.com/office/infopath/2007/PartnerControls">
+  <documentManagement>
+    <Notes xmlns="2abaa01e-9938-407e-aa0b-10580c653abd" xsi:nil="true"/>
+    <TaxCatchAll xmlns="efce84db-8738-4c7b-9bdc-65b9500871f6" xsi:nil="true"/>
+    <lcf76f155ced4ddcb4097134ff3c332f xmlns="2abaa01e-9938-407e-aa0b-10580c653abd">
+      <Terms xmlns="http://schemas.microsoft.com/office/infopath/2007/PartnerControls"/>
+    </lcf76f155ced4ddcb4097134ff3c332f>
+  </documentManagement>
+</p:properties>
 </file>
 
 <file path=customXml/itemProps1.xml><?xml version="1.0" encoding="utf-8"?>
-<ds:datastoreItem xmlns:ds="http://schemas.openxmlformats.org/officeDocument/2006/customXml" ds:itemID="{3BE9614C-AFF3-4042-B96A-BCA0CA447D5C}">
+<ds:datastoreItem xmlns:ds="http://schemas.openxmlformats.org/officeDocument/2006/customXml" ds:itemID="{D2D699D9-1B31-4616-8FB0-B4CEE1C49142}">
   <ds:schemaRefs>
-    <ds:schemaRef ds:uri="2abaa01e-9938-407e-aa0b-10580c653abd"/>
-    <ds:schemaRef ds:uri="efce84db-8738-4c7b-9bdc-65b9500871f6"/>
-    <ds:schemaRef ds:uri="http://schemas.microsoft.com/office/2006/metadata/properties"/>
-    <ds:schemaRef ds:uri="http://schemas.microsoft.com/office/infopath/2007/PartnerControls"/>
+    <ds:schemaRef ds:uri="http://schemas.microsoft.com/sharepoint/v3/contenttype/forms"/>
   </ds:schemaRefs>
 </ds:datastoreItem>
 </file>
@@ -6845,9 +6835,12 @@
 </file>
 
 <file path=customXml/itemProps3.xml><?xml version="1.0" encoding="utf-8"?>
-<ds:datastoreItem xmlns:ds="http://schemas.openxmlformats.org/officeDocument/2006/customXml" ds:itemID="{D2D699D9-1B31-4616-8FB0-B4CEE1C49142}">
+<ds:datastoreItem xmlns:ds="http://schemas.openxmlformats.org/officeDocument/2006/customXml" ds:itemID="{3BE9614C-AFF3-4042-B96A-BCA0CA447D5C}">
   <ds:schemaRefs>
-    <ds:schemaRef ds:uri="http://schemas.microsoft.com/sharepoint/v3/contenttype/forms"/>
+    <ds:schemaRef ds:uri="2abaa01e-9938-407e-aa0b-10580c653abd"/>
+    <ds:schemaRef ds:uri="efce84db-8738-4c7b-9bdc-65b9500871f6"/>
+    <ds:schemaRef ds:uri="http://schemas.microsoft.com/office/2006/metadata/properties"/>
+    <ds:schemaRef ds:uri="http://schemas.microsoft.com/office/infopath/2007/PartnerControls"/>
   </ds:schemaRefs>
 </ds:datastoreItem>
 </file>